--- a/SDC/教学资料/课件/T3-体系结构设计（一）.pptx
+++ b/SDC/教学资料/课件/T3-体系结构设计（一）.pptx
@@ -1356,6 +1356,11 @@
               <a:t>权衡：服务如何得出整数，在下一节的代码里看。这里只看逻辑视图上的边。</a:t>
             </a:r>
           </a:p>
+          <a:p>
+            <a:r>
+              <a:t>取舍：可选——时间不足时略去，不影响本课重点、后续理解与作业。</a:t>
+            </a:r>
+          </a:p>
         </p:txBody>
       </p:sp>
       <p:sp>
@@ -1736,6 +1741,11 @@
               <a:t>权衡：认证模块在这张局部的上方，没有放进这一截。mall-mbg 标着不可直接改。</a:t>
             </a:r>
           </a:p>
+          <a:p>
+            <a:r>
+              <a:t>取舍：可选——时间不足时略去，不影响本课重点、后续理解与作业。</a:t>
+            </a:r>
+          </a:p>
         </p:txBody>
       </p:sp>
       <p:sp>
@@ -2491,6 +2501,11 @@
               <a:t>权衡：算不算违背，要看边界划在哪。这页先摆出代码，不先定罪。</a:t>
             </a:r>
           </a:p>
+          <a:p>
+            <a:r>
+              <a:t>取舍：可选——时间不足时略去，不影响本课重点、后续理解与作业。</a:t>
+            </a:r>
+          </a:p>
         </p:txBody>
       </p:sp>
       <p:sp>
@@ -4268,6 +4283,11 @@
               <a:t>权衡：领域测试不依赖界面；表现测试不替代金额和状态的断言。</a:t>
             </a:r>
           </a:p>
+          <a:p>
+            <a:r>
+              <a:t>取舍：可选——时间不足时略去，不影响本课重点、后续理解与作业。</a:t>
+            </a:r>
+          </a:p>
         </p:txBody>
       </p:sp>
       <p:sp>
@@ -4573,6 +4593,11 @@
               <a:t>权衡：这句话本身没有给税率，页上不补数字；税率在来源里另有一句。</a:t>
             </a:r>
           </a:p>
+          <a:p>
+            <a:r>
+              <a:t>取舍：可选——时间不足时略去，不影响本课重点、后续理解与作业。</a:t>
+            </a:r>
+          </a:p>
         </p:txBody>
       </p:sp>
       <p:sp>
@@ -4673,6 +4698,11 @@
               <a:t>权衡：类图是 2019 年软件的设计图，还带有 Transaction 的各项税字段，这里只用来说明条件的归属。图上是英文属性名：IsFirstHouse、IsOnlyHouse、Area、IsMoreThanFiveYears。</a:t>
             </a:r>
           </a:p>
+          <a:p>
+            <a:r>
+              <a:t>取舍：可选——时间不足时略去，不影响本课重点、后续理解与作业。</a:t>
+            </a:r>
+          </a:p>
         </p:txBody>
       </p:sp>
       <p:sp>
@@ -5520,7 +5550,7 @@
           </a:p>
           <a:p>
             <a:r>
-              <a:t>依据：T2 第 50–51 页（表头与前两行的判定问题、指标，沿用）；本讲设计原则速览（来源卡 T3-S2、T3-S6、T3-S7）；突发负载页（来源卡 T3-S9）。</a:t>
+              <a:t>依据：T2 第 52–53 页（表头与前两行的判定问题、指标，沿用）；本讲设计原则速览（来源卡 T3-S2、T3-S6、T3-S7）；突发负载页（来源卡 T3-S9）。</a:t>
             </a:r>
           </a:p>
           <a:p>
@@ -6227,6 +6257,11 @@
               <a:t>权衡：绑定少写手工同步；状态名和模板对不上时，页面会空着。计价是否已离开页面，要到服务里再看。提交 81fc17e5。</a:t>
             </a:r>
           </a:p>
+          <a:p>
+            <a:r>
+              <a:t>取舍：可选——时间不足时略去，不影响本课重点、后续理解与作业。</a:t>
+            </a:r>
+          </a:p>
         </p:txBody>
       </p:sp>
       <p:sp>
@@ -6320,6 +6355,11 @@
           <a:p>
             <a:r>
               <a:t>权衡：流程稳定，事件侧要为每个按钮写处理器。内容来自 2024 第 3-3 讲第 4–10 页，不把某一种语言的事件机制写进原理。左侧类图按 2024 第 3-3 讲第 3 页重画：四个算法类都实现 IBinaryComputing 接口的 Calculate。</a:t>
+            </a:r>
+          </a:p>
+          <a:p>
+            <a:r>
+              <a:t>取舍：可选——时间不足时略去，不影响本课重点、后续理解与作业。</a:t>
             </a:r>
           </a:p>
         </p:txBody>
